--- a/_slides/slides_de_cours/12. GEN_slides.pptx
+++ b/_slides/slides_de_cours/12. GEN_slides.pptx
@@ -34,6 +34,7 @@
     <p:sldId id="587" r:id="rId22"/>
     <p:sldId id="588" r:id="rId23"/>
     <p:sldId id="599" r:id="rId24"/>
+    <p:sldId id="600" r:id="rId40"/>
     <p:sldId id="589" r:id="rId25"/>
     <p:sldId id="590" r:id="rId26"/>
     <p:sldId id="591" r:id="rId27"/>
@@ -3665,6 +3666,91 @@
           </p:cNvSpPr>
           <p:nvPr>
             <p:ph type="sldNum" sz="quarter" idx="5"/>
+          </p:nvPr>
+        </p:nvSpPr>
+        <p:spPr/>
+      </p:sp>
+    </p:spTree>
+  </p:cSld>
+  <p:clrMapOvr>
+    <a:masterClrMapping/>
+  </p:clrMapOvr>
+</p:notes>
+</file>
+
+<file path=ppt/notesSlides/notesSlide33.xml><?xml version="1.0" encoding="utf-8"?>
+<p:notes xmlns:a="http://schemas.openxmlformats.org/drawingml/2006/main" xmlns:p="http://schemas.openxmlformats.org/presentationml/2006/main" xmlns:r="http://schemas.openxmlformats.org/officeDocument/2006/relationships">
+  <p:cSld>
+    <p:spTree>
+      <p:nvGrpSpPr>
+        <p:cNvPr id="1" name=""/>
+        <p:cNvGrpSpPr/>
+        <p:nvPr/>
+      </p:nvGrpSpPr>
+      <p:grpSpPr>
+        <a:xfrm>
+          <a:off x="0" y="0"/>
+          <a:ext cx="0" cy="0"/>
+          <a:chOff x="0" y="0"/>
+          <a:chExt cx="0" cy="0"/>
+        </a:xfrm>
+      </p:grpSpPr>
+      <p:sp>
+        <p:nvSpPr>
+          <p:cNvPr id="2" name="Slide Image Placeholder 1"/>
+          <p:cNvSpPr>
+            <a:spLocks noGrp="1"/>
+          </p:cNvSpPr>
+          <p:nvPr>
+            <p:ph type="sldImg" idx="2"/>
+          </p:nvPr>
+        </p:nvSpPr>
+        <p:spPr/>
+      </p:sp>
+      <p:sp>
+        <p:nvSpPr>
+          <p:cNvPr id="3" name="Notes Placeholder 2"/>
+          <p:cNvSpPr>
+            <a:spLocks noGrp="1"/>
+          </p:cNvSpPr>
+          <p:nvPr>
+            <p:ph type="body" idx="3" sz="quarter"/>
+          </p:nvPr>
+        </p:nvSpPr>
+        <p:spPr/>
+        <p:txBody>
+          <a:bodyPr/>
+          <a:lstStyle/>
+          <a:p>
+            <a:r>
+              <a:t>Des exemples et des contre-exemples, pour les deux jokers.</a:t>
+            </a:r>
+          </a:p>
+          <a:p>
+            <a:r>
+              <a:t>List&lt;? extends Bagage&gt; : poidsTotal lit des éléments et les traite comme des Bagage. Une List&lt;Bagage&gt;, une List&lt;Valise&gt; ou une List&lt;Sac&gt; conviennent ; une List&lt;Object&gt;, non, puisqu'un Object n'est pas forcément un Bagage.</a:t>
+            </a:r>
+          </a:p>
+          <a:p>
+            <a:r>
+              <a:t>List&lt;? super Valise&gt; : charger ajoute des Valise. Une List&lt;Valise&gt;, une List&lt;Bagage&gt; ou une List&lt;Object&gt; conviennent, puisqu'une Valise y a sa place ; une List&lt;Sac&gt;, non.</a:t>
+            </a:r>
+          </a:p>
+          <a:p>
+            <a:r>
+              <a:t>Le raisonnement est toujours le même : se demander ce que la méthode fait de la liste. Le compilateur refuse exactement les cas où elle pourrait se tromper.</a:t>
+            </a:r>
+          </a:p>
+        </p:txBody>
+      </p:sp>
+      <p:sp>
+        <p:nvSpPr>
+          <p:cNvPr id="4" name="Slide Number Placeholder 3"/>
+          <p:cNvSpPr>
+            <a:spLocks noGrp="1"/>
+          </p:cNvSpPr>
+          <p:nvPr>
+            <p:ph type="sldNum" idx="5" sz="quarter"/>
           </p:nvPr>
         </p:nvSpPr>
         <p:spPr/>
@@ -23306,6 +23392,114 @@
 </p:sld>
 </file>
 
+<file path=ppt/slides/slide33.xml><?xml version="1.0" encoding="utf-8"?>
+<p:sld xmlns:a="http://schemas.openxmlformats.org/drawingml/2006/main" xmlns:p="http://schemas.openxmlformats.org/presentationml/2006/main" xmlns:r="http://schemas.openxmlformats.org/officeDocument/2006/relationships">
+  <p:cSld>
+    <p:spTree>
+      <p:nvGrpSpPr>
+        <p:cNvPr id="1" name=""/>
+        <p:cNvGrpSpPr/>
+        <p:nvPr/>
+      </p:nvGrpSpPr>
+      <p:grpSpPr/>
+      <p:sp>
+        <p:nvSpPr>
+          <p:cNvPr id="2" name="Title 1"/>
+          <p:cNvSpPr>
+            <a:spLocks noGrp="1"/>
+          </p:cNvSpPr>
+          <p:nvPr>
+            <p:ph type="title"/>
+          </p:nvPr>
+        </p:nvSpPr>
+        <p:spPr/>
+        <p:txBody>
+          <a:bodyPr>
+            <a:noAutofit/>
+          </a:bodyPr>
+          <a:lstStyle/>
+          <a:p>
+            <a:r>
+              <a:rPr sz="3600" dirty="0"/>
+              <a:t>Ce que chaque joker accepte</a:t>
+            </a:r>
+          </a:p>
+        </p:txBody>
+      </p:sp>
+      <p:sp>
+        <p:nvSpPr>
+          <p:cNvPr id="27" name="Repere de section"/>
+          <p:cNvSpPr txBox="1"/>
+          <p:nvPr/>
+        </p:nvSpPr>
+        <p:spPr>
+          <a:xfrm>
+            <a:off x="6583680" y="6382512"/>
+            <a:ext cx="4480560" cy="320040"/>
+          </a:xfrm>
+          <a:prstGeom prst="rect">
+            <a:avLst/>
+          </a:prstGeom>
+          <a:noFill/>
+        </p:spPr>
+        <p:txBody>
+          <a:bodyPr wrap="none" tIns="0" bIns="0">
+            <a:spAutoFit/>
+          </a:bodyPr>
+          <a:lstStyle/>
+          <a:p>
+            <a:pPr algn="r"/>
+            <a:r>
+              <a:rPr sz="1100">
+                <a:solidFill>
+                  <a:srgbClr val="BCBEC4"/>
+                </a:solidFill>
+              </a:rPr>
+              <a:t>GEN · </a:t>
+            </a:r>
+            <a:r>
+              <a:rPr sz="1100" b="1">
+                <a:solidFill>
+                  <a:schemeClr val="accent4"/>
+                </a:solidFill>
+              </a:rPr>
+              <a:t>4. Les jokers</a:t>
+            </a:r>
+          </a:p>
+        </p:txBody>
+      </p:sp>
+      <p:pic>
+        <p:nvPicPr>
+          <p:cNvPr id="28" name="Picture 27" descr="gen-jokers.png"/>
+          <p:cNvPicPr>
+            <a:picLocks noChangeAspect="1"/>
+          </p:cNvPicPr>
+          <p:nvPr/>
+        </p:nvPicPr>
+        <p:blipFill>
+          <a:blip r:embed="rId2"/>
+          <a:stretch>
+            <a:fillRect/>
+          </a:stretch>
+        </p:blipFill>
+        <p:spPr>
+          <a:xfrm>
+            <a:off x="1596000" y="1450000"/>
+            <a:ext cx="9000000" cy="2643749"/>
+          </a:xfrm>
+          <a:prstGeom prst="rect">
+            <a:avLst/>
+          </a:prstGeom>
+        </p:spPr>
+      </p:pic>
+    </p:spTree>
+  </p:cSld>
+  <p:clrMapOvr>
+    <a:masterClrMapping/>
+  </p:clrMapOvr>
+</p:sld>
+</file>
+
 <file path=ppt/slides/slide4.xml><?xml version="1.0" encoding="utf-8"?>
 <p:sld xmlns:a="http://schemas.openxmlformats.org/drawingml/2006/main" xmlns:r="http://schemas.openxmlformats.org/officeDocument/2006/relationships" xmlns:p="http://schemas.openxmlformats.org/presentationml/2006/main">
   <p:cSld>
